--- a/materials/week8/w8-slides.pptx
+++ b/materials/week8/w8-slides.pptx
@@ -713,7 +713,7 @@
           <a:lstStyle/>
           <a:p>
             <a:r>
-              <a:t>"หลายกลุ่มทำหน้ารายการที่พนักงานเห็นเฉพาะของตัวเองแล้ว นั่นดีครับ แต่มันคือการกรองที่หน้าจอ เมื่อกี้ผมเพิ่งพิสูจน์ให้ดูว่าคนแปลกหน้าอ้อมหน้าจอไปหยิบจากฐานตรง ๆ ได้" · เปรียบ: ซ่อนสวิตช์ไฟไม่ได้แปลว่าตัดไฟ</a:t>
+              <a:t>"หลายคนทำหน้ารายการที่พนักงานเห็นเฉพาะของตัวเองแล้ว นั่นดีครับ แต่มันคือการกรองที่หน้าจอ เมื่อกี้ผมเพิ่งพิสูจน์ให้ดูว่าคนแปลกหน้าอ้อมหน้าจอไปหยิบจากฐานตรง ๆ ได้" · เปรียบ: ซ่อนสวิตช์ไฟไม่ได้แปลว่าตัดไฟ</a:t>
             </a:r>
           </a:p>
         </p:txBody>
@@ -853,7 +853,7 @@
           <a:lstStyle/>
           <a:p>
             <a:r>
-              <a:t>อ่านออกเสียงทีละข้อช้า ๆ · ข้อ 2 ขยาย — "แปลว่าปลอมชื่อคนอื่นยื่นเอกสารไม่ได้ เพราะช่องเจ้าของต้องตรงกับ uid ของคนที่ล็อกอินจริง" · ข้อ 3 ขยาย — "ของ FixIt คนที่เห็นทุกใบคือช่างซ่อมกับผู้ดูแล ของ LeaveEasy คือหัวหน้า แล้วของโครงงานกลุ่มคุณคือใคร ให้คิดค้างไว้"</a:t>
+              <a:t>อ่านออกเสียงทีละข้อช้า ๆ · ข้อ 2 ขยาย — "แปลว่าปลอมชื่อคนอื่นยื่นเอกสารไม่ได้ เพราะช่องเจ้าของต้องตรงกับ uid ของคนที่ล็อกอินจริง" · ข้อ 3 ขยาย — "ของ FixIt คนที่เห็นทุกใบคือช่างซ่อมกับผู้ดูแล ของ LeaveEasy คือหัวหน้า แล้วของหัวข้อของคุณคือใคร ให้คิดค้างไว้"</a:t>
             </a:r>
           </a:p>
         </p:txBody>
@@ -1553,7 +1553,7 @@
           <a:lstStyle/>
           <a:p>
             <a:r>
-              <a:t>เชื่อม Module 1 — "PDPA ที่เรียนเดือนแรกคือกฎหมาย วันนี้เราเห็นรูที่ข้อมูลรั่วออกจริง และเห็นวิธีอุด" · ย้ำเงื่อนไข: ปลดล็อกเฉพาะกลุ่มที่ทดสอบสวมรอยผ่านแล้วเท่านั้น ไม่ใช่เขียนกฎเสร็จอย่างเดียว</a:t>
+              <a:t>เชื่อม Module 1 — "PDPA ที่เรียนเดือนแรกคือกฎหมาย วันนี้เราเห็นรูที่ข้อมูลรั่วออกจริง และเห็นวิธีอุด" · ย้ำเงื่อนไข: ปลดล็อกเฉพาะคนที่ทดสอบสวมรอยผ่านแล้วเท่านั้น ไม่ใช่เขียนกฎเสร็จอย่างเดียว</a:t>
             </a:r>
           </a:p>
         </p:txBody>
@@ -1623,7 +1623,7 @@
           <a:lstStyle/>
           <a:p>
             <a:r>
-              <a:t>อ่านทีละข้อ แล้วให้กลุ่มที่ยังไม่ชัดเรื่องโฟลเดอร์ย่อยพิมพ์เลข 5 ในแชท ตอบให้จบก่อนพัก · เก็บคำถามอื่นให้ TA จดเข้าธนาคารคำตอบสด</a:t>
+              <a:t>อ่านทีละข้อ แล้วให้คนที่ยังไม่ชัดเรื่องโฟลเดอร์ย่อยพิมพ์เลข 5 ในแชท ตอบให้จบก่อนพัก · เก็บคำถามอื่นให้ TA จดเข้าธนาคารคำตอบสด</a:t>
             </a:r>
           </a:p>
         </p:txBody>
@@ -1903,7 +1903,7 @@
           <a:lstStyle/>
           <a:p>
             <a:r>
-              <a:t>หยุด 2 วินาที แล้วพูดว่า "ฟีเจอร์แบบนี้แหละที่ทำให้ระบบของกลุ่มคุณต่างจากแบบฟอร์มธรรมดา และมันคือของส่งมอบของสัปดาห์นี้"</a:t>
+              <a:t>หยุด 2 วินาที แล้วพูดว่า "ฟีเจอร์แบบนี้แหละที่ทำให้ระบบของคุณต่างจากแบบฟอร์มธรรมดา และมันคือของส่งมอบของสัปดาห์นี้"</a:t>
             </a:r>
           </a:p>
         </p:txBody>
@@ -2253,7 +2253,7 @@
           <a:lstStyle/>
           <a:p>
             <a:r>
-              <a:t>ประกาศวิธีแจก — "คีย์ของกลุ่มจะส่งให้ทางแชทส่วนตัวของแต่ละกลุ่มตอนพักเที่ยง ห้ามโพสต์ในห้องรวมเด็ดขาด" · ย้ำเรื่องวงเงิน — "ทุกใบมีวงเงินจำกัด เพราะฉะนั้นถ้าคีย์หลุด ความเสียหายมีเพดาน แต่เราจะไม่ทำให้มันหลุดตั้งแต่แรก สไลด์ถัดไปคือวิธี"</a:t>
+              <a:t>ประกาศวิธีแจก — "คีย์รายคนจะส่งให้ทางแชทส่วนตัวตอนพักเที่ยง ห้ามโพสต์ในห้องรวมเด็ดขาด" · ย้ำเรื่องวงเงิน — "ทุกใบมีวงเงินจำกัด เพราะฉะนั้นถ้าคีย์หลุด ความเสียหายมีเพดาน แต่เราจะไม่ทำให้มันหลุดตั้งแต่แรก สไลด์ถัดไปคือวิธี"</a:t>
             </a:r>
           </a:p>
         </p:txBody>
@@ -2463,7 +2463,7 @@
           <a:lstStyle/>
           <a:p>
             <a:r>
-              <a:t>ประโยคที่ต้องพูดทุกครั้งที่แจกคีย์ — "คีย์ที่กลุ่มคุณใส่ในเว็บวันนี้ คนอื่นเปิดดูได้ เรายอมรับได้ในคาบเรียนเพราะผมตั้งวงเงินไว้ให้แล้ว แต่ถ้าเป็นระบบจริง ห้ามทำแบบนี้ — ต้องมีตัวกลางเก็บคีย์ไว้ฝั่งที่ผู้ใช้แตะไม่ได้" · บอกว่าก่อนจบช่วงนี้จะให้ทุกกลุ่มเปิดดูคีย์ตัวเองในเว็บจริงด้วยตา</a:t>
+              <a:t>ประโยคที่ต้องพูดทุกครั้งที่แจกคีย์ — "คีย์ที่คุณใส่ในเว็บวันนี้ คนอื่นเปิดดูได้ เรายอมรับได้ในคาบเรียนเพราะผมตั้งวงเงินไว้ให้แล้ว แต่ถ้าเป็นระบบจริง ห้ามทำแบบนี้ — ต้องมีตัวกลางเก็บคีย์ไว้ฝั่งที่ผู้ใช้แตะไม่ได้" · บอกว่าก่อนจบช่วงนี้จะให้ทุกคนเปิดดูคีย์ตัวเองในเว็บจริงด้วยตา</a:t>
             </a:r>
           </a:p>
         </p:txBody>
@@ -3233,7 +3233,7 @@
           <a:lstStyle/>
           <a:p>
             <a:r>
-              <a:t>สไลด์ทวนกลางช่วง (ผ่านมา ~45 นาที) — ให้แต่ละกลุ่มพิมพ์ 🟢🟡🔴 ในแชทว่าตามทันไหม · ถ้ามี 🔴 เยอะ ให้ทวนเส้นทางปุ่ม AI อีกหนึ่งนาทีก่อนขึ้นระดับ 2</a:t>
+              <a:t>สไลด์ทวนกลางช่วง (ผ่านมา ~45 นาที) — ให้แต่ละคนพิมพ์ 🟢🟡🔴 ในแชทว่าตามทันไหม · ถ้ามี 🔴 เยอะ ให้ทวนเส้นทางปุ่ม AI อีกหนึ่งนาทีก่อนขึ้นระดับ 2</a:t>
             </a:r>
           </a:p>
         </p:txBody>
@@ -3793,7 +3793,7 @@
           <a:lstStyle/>
           <a:p>
             <a:r>
-              <a:t>ทำให้ดูจริงบนเว็บ FixIt ที่ deploy แล้ว — "ผมไม่ได้ทำอะไรพลาด นี่คือธรรมชาติของเว็บที่ไม่มีตัวกลาง" · บ่ายนี้ทุกกลุ่มต้องเปิดดูคีย์ตัวเองด้วยตา แล้วจดบรรทัด Backlog นี้จริง ๆ — ความรู้ที่เห็นกับตาอยู่ทนกว่าความรู้ที่ถูกบอก · หลังคาบผู้สอนเพิกถอนคีย์ใบที่ใช้สาธิต</a:t>
+              <a:t>ทำให้ดูจริงบนเว็บ FixIt ที่ deploy แล้ว — "ผมไม่ได้ทำอะไรพลาด นี่คือธรรมชาติของเว็บที่ไม่มีตัวกลาง" · บ่ายนี้ทุกคนต้องเปิดดูคีย์ตัวเองด้วยตา แล้วจดบรรทัด Backlog นี้จริง ๆ — ความรู้ที่เห็นกับตาอยู่ทนกว่าความรู้ที่ถูกบอก · หลังคาบผู้สอนเพิกถอนคีย์ใบที่ใช้สาธิต</a:t>
             </a:r>
           </a:p>
         </p:txBody>
@@ -3863,7 +3863,7 @@
           <a:lstStyle/>
           <a:p>
             <a:r>
-              <a:t>อ่านทีละข้อ ให้กลุ่มพิมพ์เลขข้อที่ยังไม่ชัดในแชท · เรื่องที่มักถามตรงนี้คือความต่างระดับ 1 กับ 2 — ตอบสั้น: "ระดับ 1 ถามหนึ่งได้หนึ่ง ระดับ 2 อ่านหลายที่ ตัดสินใจ แล้วทิ้งบันทึกไว้"</a:t>
+              <a:t>อ่านทีละข้อ ให้พิมพ์เลขข้อที่ยังไม่ชัดในแชท · เรื่องที่มักถามตรงนี้คือความต่างระดับ 1 กับ 2 — ตอบสั้น: "ระดับ 1 ถามหนึ่งได้หนึ่ง ระดับ 2 อ่านหลายที่ ตัดสินใจ แล้วทิ้งบันทึกไว้"</a:t>
             </a:r>
           </a:p>
         </p:txBody>
@@ -4143,7 +4143,7 @@
           <a:lstStyle/>
           <a:p>
             <a:r>
-              <a:t>ชี้กล่องแรก — "เราไม่ไปหาเมนูตั้งค่าที่ไหน พิมพ์สั่งเป็นภาษาไทยให้ Claude สร้างไฟล์ให้ วิธีนี้ใช้ได้เหมือนกันทุกเวอร์ชัน" · หยุดที่กล่องเข้ม — "จังหวะนี้เป็นของเรา เปิดไฟล์ที่มันสร้างมาอ่านด้วยตา ถ้าไม่อ่าน เราจะตอบไม่ได้ตอนนำเสนอว่าใครตรวจงานเรา" · กล่องขวา — "ค่อยสั่งให้เริ่มตรวจ" · นี่คือวงจรเดิม เปลี่ยนจากตรวจแผนเป็นตรวจไฟล์</a:t>
+              <a:t>ชี้กล่องแรก — "เราไม่ไปหาเมนูตั้งค่าที่ไหน พิมพ์สั่งเป็นภาษาไทยให้ Claude สร้างไฟล์ให้ วิธีนี้ใช้ได้เหมือนกันทุกเวอร์ชัน" · หยุดที่กล่องเข้ม — "จังหวะนี้เป็นของเรา เปิดไฟล์ที่มันสร้างมาอ่านด้วยตา ถ้าไม่อ่าน เราจะตอบไม่ได้ตอน Consult ว่าใครตรวจงานเรา" · กล่องขวา — "ค่อยสั่งให้เริ่มตรวจ" · นี่คือวงจรเดิม เปลี่ยนจากตรวจแผนเป็นตรวจไฟล์</a:t>
             </a:r>
           </a:p>
         </p:txBody>
@@ -4563,7 +4563,7 @@
           <a:lstStyle/>
           <a:p>
             <a:r>
-              <a:t>ประโยคที่ต้องพูด — "ห้ามพิมพ์ว่า แก้ทั้งหมดให้ที เด็ดขาด ระบบที่ใช้งานได้จะพังทั้งระบบในสองนาที" · คนตัดสินใจว่าแก้อะไรคือกลุ่ม ไม่ใช่ AI · Reviewer เดาผิดได้เหมือน AI ทุกตัว รายงานที่ว่าผ่านหมดก็ไม่ใช่ใบรับประกัน</a:t>
+              <a:t>ประโยคที่ต้องพูด — "ห้ามพิมพ์ว่า แก้ทั้งหมดให้ที เด็ดขาด ระบบที่ใช้งานได้จะพังทั้งระบบในสองนาที" · คนตัดสินใจว่าแก้อะไรคือคุณ ไม่ใช่ AI · Reviewer เดาผิดได้เหมือน AI ทุกตัว รายงานที่ว่าผ่านหมดก็ไม่ใช่ใบรับประกัน</a:t>
             </a:r>
           </a:p>
         </p:txBody>
@@ -4633,7 +4633,7 @@
           <a:lstStyle/>
           <a:p>
             <a:r>
-              <a:t>🎬 เดโมขั้นที่ 12 (4 นาที) — จัด 3 กองแล้วแก้กองแดง 1 ข้อให้ดูจบวง · "แก้ทีละข้อ commit ทีละข้อ พอพังจะรู้ทันทีว่าพังเพราะข้อไหน วินัยเดิมตั้งแต่สัปดาห์ที่ 6" · บรรทัดสุดท้ายคือกติกากลุ่มของบ่ายนี้ด้วย</a:t>
+              <a:t>🎬 เดโมขั้นที่ 12 (4 นาที) — จัด 3 กองแล้วแก้กองแดง 1 ข้อให้ดูจบวง · "แก้ทีละข้อ commit ทีละข้อ พอพังจะรู้ทันทีว่าพังเพราะข้อไหน วินัยเดิมตั้งแต่สัปดาห์ที่ 6" · บรรทัดสุดท้ายคือกติกาของบ่ายนี้ด้วย</a:t>
             </a:r>
           </a:p>
         </p:txBody>
@@ -4913,7 +4913,7 @@
           <a:lstStyle/>
           <a:p>
             <a:r>
-              <a:t>ฉายค้าง 1 นาที — "เช้านี้ผมทำกับ FixIt · ในใบงานมีเฉลยตัวอย่างของ LeaveEasy กำกับทุกขั้น · แต่สิ่งที่กลุ่มคุณลงมือทำจริงคือช่องขวาสุด โครงงานของกลุ่มเอง" · แถวสอง ย้ำเรื่องโฟลเดอร์ย่อย — "กฎข้อ 5 ของกลุ่มคุณ คือโฟลเดอร์ในช่องนี้"</a:t>
+              <a:t>ฉายค้าง 1 นาที — "เช้านี้ผมทำกับ FixIt · บ่ายนี้ทุกคนทำ LeaveEasy พร้อมกัน · แล้วช่องขวาสุดคือการบ้าน หัวข้อของตัวเอง" · แถวสอง ย้ำเรื่องโฟลเดอร์ย่อย — "กฎข้อ 5 ของคุณ คือโฟลเดอร์ในช่องนี้"</a:t>
             </a:r>
           </a:p>
         </p:txBody>
@@ -4983,7 +4983,7 @@
           <a:lstStyle/>
           <a:p>
             <a:r>
-              <a:t>แถวบนคือระดับ 1 แถวล่างคือระดับ 2 · ปิดด้วยคำถามประจำหลักสูตร — "โครงงานของกลุ่มคุณ งานคัดแยกคืออะไร และใครในระบบของคุณที่ควรได้ผู้ช่วยสรุปข้อมูลก่อนตัดสินใจ" · ให้พิมพ์คำตอบลงแชทก่อนพักเที่ยง</a:t>
+              <a:t>แถวบนคือระดับ 1 แถวล่างคือระดับ 2 · ปิดด้วยคำถามประจำหลักสูตร — "หัวข้อของคุณ งานคัดแยกคืออะไร และใครในระบบของคุณที่ควรได้ผู้ช่วยสรุปข้อมูลก่อนตัดสินใจ" · ให้พิมพ์คำตอบลงแชทก่อนพักเที่ยง</a:t>
             </a:r>
           </a:p>
         </p:txBody>
@@ -5053,7 +5053,7 @@
           <a:lstStyle/>
           <a:p>
             <a:r>
-              <a:t>"ระดับ 1 ต้องเสร็จในคาบ ส่วน C ยกไปทำระหว่างสัปดาห์ได้ แต่ต้องเสร็จก่อนส่งงาน เพราะ Reviewer เป็นของส่งมอบตามคู่มือ" · ใบงานอยู่ใน Google Classroom แล้ว ให้เปิดอ่าน "สิ่งที่ต้องมีก่อนเริ่ม" ตอนพักเที่ยง · คีย์ OpenRouter ส่งให้ทางแชทส่วนตัวของกลุ่มตอน 13:00 พร้อมชื่อโมเดลหลักและสำรอง</a:t>
+              <a:t>"ลำดับตัดคือ A → B → C → D · ส่วน B ต้องเสร็จในคาบ · ส่วน D ยกไปทำในการบ้านได้ แต่ต้องเสร็จก่อนส่ง เพราะ Reviewer เป็นของส่งมอบตามคู่มือ" · ใบงานอยู่ใน Google Classroom แล้ว ให้เปิดอ่าน "สิ่งที่ต้องมีก่อนเริ่ม" ตอนพักเที่ยง · คีย์ OpenRouter ส่งให้ทางแชทส่วนตัวรายคนตอน 13:00 พร้อมชื่อโมเดลหลักและสำรอง</a:t>
             </a:r>
           </a:p>
         </p:txBody>
@@ -5123,7 +5123,7 @@
           <a:lstStyle/>
           <a:p>
             <a:r>
-              <a:t>"ถ้าทำไม่ทัน ให้ถึงจุดที่ 2 เป็นอย่างน้อย — ห้ามจบสัปดาห์นี้โดยที่กฎยังเปิดกว้าง เพราะระบบอยู่บนอินเทอร์เน็ตแล้ว" · จุดที่ 1 จะทดสอบกันจริงโดยให้กลุ่มแลก URL กัน</a:t>
+              <a:t>"ถ้าทำไม่ทัน ให้ถึงจุดที่ 2 เป็นอย่างน้อย — ห้ามจบสัปดาห์นี้โดยที่กฎยังเปิดกว้าง เพราะระบบอยู่บนอินเทอร์เน็ตแล้ว" · จุดที่ 1 ต้องทดสอบด้วยการสวมรอยจริง ไม่ใช่ดูหน้าจอตัวเอง</a:t>
             </a:r>
           </a:p>
         </p:txBody>
@@ -5263,7 +5263,7 @@
           <a:lstStyle/>
           <a:p>
             <a:r>
-              <a:t>อ่านช้า ๆ — "ข้อสองไม่ใช่คำแนะนำ เป็นเกณฑ์ผ่าน Module คนที่ไม่มี commit เลยคือยังไม่ผ่านรายบุคคล" · ข้อสามมีไว้จับว่ากลุ่มเดินเร็วเกินคนในกลุ่มหรือเปล่า · ย้ำไฟจราจร 🟢🟡🔴 กับการโพสต์ screenshot ทุก Checkpoint</a:t>
+              <a:t>อ่านช้า ๆ — "ข้อสองไม่ใช่คำแนะนำ เป็นเกณฑ์ผ่าน Module คนที่ไม่มี commit เลยคือยังไม่ผ่าน" · ข้อสามมีไว้จับว่าเดินเร็วเกินไปหรือเปล่า · ย้ำไฟจราจร 🟢🟡🔴 กับการโพสต์ screenshot ทุก Checkpoint</a:t>
             </a:r>
           </a:p>
         </p:txBody>
@@ -5333,7 +5333,7 @@
           <a:lstStyle/>
           <a:p>
             <a:r>
-              <a:t>ปิดคาบด้วยคำถามนี้เสมอ · ให้ทุกกลุ่มพิมพ์คำตอบสองบรรทัดลงแชทก่อนพักเที่ยง — บรรทัดแรก ใครควรเห็นข้อมูลของใคร · บรรทัดสอง ผู้ช่วย AI ของกลุ่มจะช่วยงานไหน · TA กวาดตาดูว่ากลุ่มไหนยังตอบไม่ได้ แล้วจัดคิว Consult ให้เลย</a:t>
+              <a:t>ปิดคาบด้วยคำถามนี้เสมอ · ให้ทุกคนพิมพ์คำตอบสองบรรทัดลงแชทก่อนพักเที่ยง — บรรทัดแรก ใครควรเห็นข้อมูลของใคร · บรรทัดสอง ผู้ช่วย AI ของคุณจะช่วยงานไหน · TA กวาดตาดูว่าใครยังตอบไม่ได้ แล้วจัดคิว Consult ให้เลย</a:t>
             </a:r>
           </a:p>
         </p:txBody>
@@ -5403,7 +5403,7 @@
           <a:lstStyle/>
           <a:p>
             <a:r>
-              <a:t>เชื่อมกลับสัปดาห์ที่ 7 — "ตอนนั้นผมบอกไว้แล้วว่ากุญแจประตูหน้าบ้านยังไม่ใช่ความปลอดภัยจริง และห้ามใส่ข้อมูลจริงของใครจนกว่าจะปิดรายห้อง วันนี้คือวันปิดรายห้อง" · ถามห้อง: "ระบบของกลุ่มคุณตอนนี้ ใครสมัครก็อ่านได้แบบนี้เหมือนกันไหมครับ" — คำตอบคือใช่ทุกกลุ่ม</a:t>
+              <a:t>เชื่อมกลับสัปดาห์ที่ 7 — "ตอนนั้นผมบอกไว้แล้วว่ากุญแจประตูหน้าบ้านยังไม่ใช่ความปลอดภัยจริง และห้ามใส่ข้อมูลจริงของใครจนกว่าจะปิดรายห้อง วันนี้คือวันปิดรายห้อง" · ถามห้อง: "ระบบของคุณตอนนี้ ใครสมัครก็อ่านได้แบบนี้เหมือนกันไหมครับ" — คำตอบคือใช่ทุกคน</a:t>
             </a:r>
           </a:p>
         </p:txBody>
@@ -11099,7 +11099,7 @@
         <p:spPr>
           <a:xfrm>
             <a:off x="822960" y="502920"/>
-            <a:ext cx="10545775" cy="1408176"/>
+            <a:ext cx="10545775" cy="804672"/>
           </a:xfrm>
           <a:prstGeom prst="rect">
             <a:avLst/>
@@ -11122,7 +11122,7 @@
                 <a:ea typeface="Leelawadee UI"/>
                 <a:cs typeface="Leelawadee UI"/>
               </a:rPr>
-              <a:t>สัปดาห์ที่แล้ว ระบบของกลุ่มคุณออกสู่โลกแล้ว</a:t>
+              <a:t>สัปดาห์ที่แล้ว ระบบของคุณออกสู่โลกแล้ว</a:t>
             </a:r>
           </a:p>
         </p:txBody>
@@ -11135,7 +11135,7 @@
         </p:nvSpPr>
         <p:spPr>
           <a:xfrm>
-            <a:off x="822960" y="2075688"/>
+            <a:off x="822960" y="1472184"/>
             <a:ext cx="10545775" cy="560324"/>
           </a:xfrm>
           <a:prstGeom prst="rect">
@@ -11172,7 +11172,7 @@
         </p:nvSpPr>
         <p:spPr>
           <a:xfrm>
-            <a:off x="822960" y="2690876"/>
+            <a:off x="822960" y="2087372"/>
             <a:ext cx="10545775" cy="560324"/>
           </a:xfrm>
           <a:prstGeom prst="rect">
@@ -11209,7 +11209,7 @@
         </p:nvSpPr>
         <p:spPr>
           <a:xfrm>
-            <a:off x="822960" y="3306064"/>
+            <a:off x="822960" y="2702560"/>
             <a:ext cx="10545775" cy="560324"/>
           </a:xfrm>
           <a:prstGeom prst="rect">
@@ -13138,7 +13138,7 @@
                 <a:ea typeface="Leelawadee UI"/>
                 <a:cs typeface="Leelawadee UI"/>
               </a:rPr>
-              <a:t>ระบบของกลุ่ม</a:t>
+              <a:t>ระบบของคุณ</a:t>
             </a:r>
           </a:p>
         </p:txBody>
@@ -14533,7 +14533,7 @@
                 <a:ea typeface="Leelawadee UI"/>
                 <a:cs typeface="Leelawadee UI"/>
               </a:rPr>
-              <a:t>กุญแจ (API key) ของกลุ่มคุณ</a:t>
+              <a:t>กุญแจ (API key) ของคุณ</a:t>
             </a:r>
           </a:p>
         </p:txBody>
@@ -14607,7 +14607,7 @@
                 <a:ea typeface="Leelawadee UI"/>
                 <a:cs typeface="Leelawadee UI"/>
               </a:rPr>
-              <a:t>• กลุ่มละ 1 ใบ ผู้สอนตั้งวงเงินไว้แล้วทุกใบ</a:t>
+              <a:t>• คนละ 1 ใบ ผู้สอนตั้งวงเงินไว้แล้วทุกใบ</a:t>
             </a:r>
           </a:p>
         </p:txBody>
@@ -14644,7 +14644,7 @@
                 <a:ea typeface="Leelawadee UI"/>
                 <a:cs typeface="Leelawadee UI"/>
               </a:rPr>
-              <a:t>• ใครถือกุญแจ ก็เรียก AI ในนามกลุ่มคุณได้</a:t>
+              <a:t>• ใครถือกุญแจ ก็เรียก AI ในนามคุณได้</a:t>
             </a:r>
           </a:p>
         </p:txBody>
@@ -16354,7 +16354,7 @@
                 <a:ea typeface="Leelawadee UI"/>
                 <a:cs typeface="Leelawadee UI"/>
               </a:rPr>
-              <a:t>• 👥 โครงงานกลุ่มคุณ: งานคัดแยกของคุณคืออะไร</a:t>
+              <a:t>• 👥 หัวข้อของคุณ: งานคัดแยกของคุณคืออะไร</a:t>
             </a:r>
           </a:p>
         </p:txBody>
@@ -20609,7 +20609,7 @@
                 <a:ea typeface="Leelawadee UI"/>
                 <a:cs typeface="Leelawadee UI"/>
               </a:rPr>
-              <a:t>• จะเห็นคีย์ของกลุ่มอ่านได้ด้วยตาเปล่า</a:t>
+              <a:t>• จะเห็นคีย์ของตัวเองอ่านได้ด้วยตาเปล่า</a:t>
             </a:r>
           </a:p>
         </p:txBody>
@@ -24042,7 +24042,7 @@
         <p:spPr>
           <a:xfrm>
             <a:off x="822960" y="502920"/>
-            <a:ext cx="10545775" cy="1408176"/>
+            <a:ext cx="10545775" cy="804672"/>
           </a:xfrm>
           <a:prstGeom prst="rect">
             <a:avLst/>
@@ -24065,7 +24065,7 @@
                 <a:ea typeface="Leelawadee UI"/>
                 <a:cs typeface="Leelawadee UI"/>
               </a:rPr>
-              <a:t>🔗 ตารางเทียบ — ช่องขวาเว้นให้กลุ่มคุณเติม</a:t>
+              <a:t>🔗 ตารางเทียบ — ช่องขวาเว้นให้คุณเติม</a:t>
             </a:r>
           </a:p>
         </p:txBody>
@@ -24079,7 +24079,7 @@
           <p:nvPr/>
         </p:nvGraphicFramePr>
         <p:xfrm>
-          <a:off x="822960" y="2075688"/>
+          <a:off x="822960" y="1472184"/>
           <a:ext cx="10545775" cy="2011680"/>
         </p:xfrm>
         <a:graphic>
@@ -24159,7 +24159,7 @@
                           <a:ea typeface="Leelawadee UI"/>
                           <a:cs typeface="Leelawadee UI"/>
                         </a:rPr>
-                        <a:t>👥 กลุ่มคุณ</a:t>
+                        <a:t>👥 คุณ</a:t>
                       </a:r>
                     </a:p>
                   </a:txBody>
@@ -24585,7 +24585,7 @@
                           <a:ea typeface="Leelawadee UI"/>
                           <a:cs typeface="Leelawadee UI"/>
                         </a:rPr>
-                        <a:t>👥 กลุ่มคุณ</a:t>
+                        <a:t>👥 คุณ</a:t>
                       </a:r>
                     </a:p>
                   </a:txBody>
@@ -24840,7 +24840,7 @@
                 <a:ea typeface="Leelawadee UI"/>
                 <a:cs typeface="Leelawadee UI"/>
               </a:rPr>
-              <a:t>🔧 Workshop บ่ายนี้ — โครงงานของกลุ่มคุณ</a:t>
+              <a:t>🔧 Workshop บ่ายนี้ — LeaveEasy</a:t>
             </a:r>
           </a:p>
         </p:txBody>
@@ -24877,7 +24877,7 @@
                 <a:ea typeface="Leelawadee UI"/>
                 <a:cs typeface="Leelawadee UI"/>
               </a:rPr>
-              <a:t>• ส่วน A ปิดข้อมูล 5 ข้อ + สวมรอย ⏱ 40 นาที</a:t>
+              <a:t>• ส่วน A ปิดข้อมูล 5 ข้อ + สวมรอย ⏱ 35 นาที</a:t>
             </a:r>
           </a:p>
         </p:txBody>
@@ -24914,7 +24914,7 @@
                 <a:ea typeface="Leelawadee UI"/>
                 <a:cs typeface="Leelawadee UI"/>
               </a:rPr>
-              <a:t>• ส่วน B ผู้ช่วย AI ระดับ 1 → ระดับ 2 ⏱ 70 นาที</a:t>
+              <a:t>• ส่วน B ผู้ช่วย AI ระดับ 1 ⏱ 40 นาที</a:t>
             </a:r>
           </a:p>
         </p:txBody>
@@ -24951,7 +24951,7 @@
                 <a:ea typeface="Leelawadee UI"/>
                 <a:cs typeface="Leelawadee UI"/>
               </a:rPr>
-              <a:t>• ส่วน C Reviewer + แก้กองแดง ⏱ 30 นาที</a:t>
+              <a:t>• ส่วน C ผู้ช่วย AI ระดับ 2 (agentic) ⏱ 35 นาที</a:t>
             </a:r>
           </a:p>
         </p:txBody>
@@ -24988,7 +24988,7 @@
                 <a:ea typeface="Leelawadee UI"/>
                 <a:cs typeface="Leelawadee UI"/>
               </a:rPr>
-              <a:t>• ลำดับตัดเมื่อไม่ทัน: A → B → C</a:t>
+              <a:t>• ส่วน D Reviewer + แก้กองแดง ⏱ 25 นาที</a:t>
             </a:r>
           </a:p>
         </p:txBody>
@@ -25441,7 +25441,7 @@
                 <a:ea typeface="Leelawadee UI"/>
                 <a:cs typeface="Leelawadee UI"/>
               </a:rPr>
-              <a:t>🚩 Checkpoint 3 จุดของบ่ายนี้</a:t>
+              <a:t>🚩 Checkpoint 4 จุดของบ่ายนี้</a:t>
             </a:r>
           </a:p>
         </p:txBody>
@@ -25478,7 +25478,7 @@
                 <a:ea typeface="Leelawadee UI"/>
                 <a:cs typeface="Leelawadee UI"/>
               </a:rPr>
-              <a:t>• 1 กลุ่มอื่นเปิด URL ใช้ได้ แต่เปิดดูข้อมูลเราไม่ได้</a:t>
+              <a:t>• 1 สมัครบัญชีที่สองแล้วเปิดข้อมูลบัญชีแรกไม่ได้</a:t>
             </a:r>
           </a:p>
         </p:txBody>
@@ -25552,7 +25552,7 @@
                 <a:ea typeface="Leelawadee UI"/>
                 <a:cs typeface="Leelawadee UI"/>
               </a:rPr>
-              <a:t>• 3 ระดับ 2 ทำงานเป็นขั้นได้ (หรือ Reviewer ตั้งแล้ว)</a:t>
+              <a:t>• 3 ระดับ 2 ทำงานเป็นขั้นได้ + มีบันทึก aiLog</a:t>
             </a:r>
           </a:p>
         </p:txBody>
@@ -25560,6 +25560,43 @@
       <p:sp>
         <p:nvSpPr>
           <p:cNvPr id="6" name="TextBox 5"/>
+          <p:cNvSpPr txBox="1"/>
+          <p:nvPr/>
+        </p:nvSpPr>
+        <p:spPr>
+          <a:xfrm>
+            <a:off x="822960" y="3786632"/>
+            <a:ext cx="10545775" cy="560324"/>
+          </a:xfrm>
+          <a:prstGeom prst="rect">
+            <a:avLst/>
+          </a:prstGeom>
+          <a:noFill/>
+        </p:spPr>
+        <p:txBody>
+          <a:bodyPr wrap="square">
+            <a:spAutoFit/>
+          </a:bodyPr>
+          <a:lstStyle/>
+          <a:p>
+            <a:pPr algn="l"/>
+            <a:r>
+              <a:rPr sz="2600" b="0">
+                <a:solidFill>
+                  <a:srgbClr val="1A1A1A"/>
+                </a:solidFill>
+                <a:latin typeface="Leelawadee UI"/>
+                <a:ea typeface="Leelawadee UI"/>
+                <a:cs typeface="Leelawadee UI"/>
+              </a:rPr>
+              <a:t>• 4 Reviewer รายงานแล้ว + แก้กองแดง 1 ข้อ</a:t>
+            </a:r>
+          </a:p>
+        </p:txBody>
+      </p:sp>
+      <p:sp>
+        <p:nvSpPr>
+          <p:cNvPr id="7" name="TextBox 6"/>
           <p:cNvSpPr txBox="1"/>
           <p:nvPr/>
         </p:nvSpPr>
@@ -25643,7 +25680,7 @@
                 <a:ea typeface="Leelawadee UI"/>
                 <a:cs typeface="Leelawadee UI"/>
               </a:rPr>
-              <a:t>👥 กติกากลุ่มของบ่ายนี้</a:t>
+              <a:t>👥 กติกาของบ่ายนี้</a:t>
             </a:r>
           </a:p>
         </p:txBody>
@@ -25680,7 +25717,7 @@
                 <a:ea typeface="Leelawadee UI"/>
                 <a:cs typeface="Leelawadee UI"/>
               </a:rPr>
-              <a:t>• 🔄 หมุนคนคุมคีย์บอร์ดทุก Checkpoint จดชื่อไว้</a:t>
+              <a:t>• 🖥️ สลับคนนำจอทุก Checkpoint · ทุกคนพิมพ์เอง</a:t>
             </a:r>
           </a:p>
         </p:txBody>
@@ -25845,7 +25882,7 @@
                 <a:ea typeface="Leelawadee UI"/>
                 <a:cs typeface="Leelawadee UI"/>
               </a:rPr>
-              <a:t>ขั้นตอนที่เพิ่งดู — ในโครงงานของกลุ่มคุณคืออะไร</a:t>
+              <a:t>ขั้นตอนที่เพิ่งดู — ในหัวข้อของคุณคืออะไร</a:t>
             </a:r>
           </a:p>
         </p:txBody>

--- a/materials/week8/w8-slides.pptx
+++ b/materials/week8/w8-slides.pptx
@@ -24365,7 +24365,7 @@
                           <a:ea typeface="Leelawadee UI"/>
                           <a:cs typeface="Leelawadee UI"/>
                         </a:rPr>
-                        <a:t>employee / manager</a:t>
+                        <a:t>employee / manager / hr</a:t>
                       </a:r>
                     </a:p>
                   </a:txBody>

--- a/materials/week8/w8-slides.pptx
+++ b/materials/week8/w8-slides.pptx
@@ -2393,7 +2393,7 @@
           <a:lstStyle/>
           <a:p>
             <a:r>
-              <a:t>พูดว่า "ก่อนเขียนฟีเจอร์ AI สักบรรทัด ผมจัดการเรื่องกุญแจก่อน เพราะถ้าทำทีหลัง มันจะหลุดขึ้น GitHub ไปแล้ว" · สลับไปหน้าจอจริง เดินตาม w8-demo-fixit.md ก้อน B</a:t>
+              <a:t>📍 สคริปต์สาธิต: w8-demo-fixit.md → ก้อน B · จบแล้วกลับเข้าสไลด์หน้า 35 · พูดว่า "ก่อนเขียนฟีเจอร์ AI สักบรรทัด ผมจัดการเรื่องกุญแจก่อน เพราะถ้าทำทีหลัง มันจะหลุดขึ้น GitHub ไปแล้ว"</a:t>
             </a:r>
           </a:p>
         </p:txBody>
@@ -4353,7 +4353,7 @@
           <a:lstStyle/>
           <a:p>
             <a:r>
-              <a:t>พูดว่า "ผมจะไม่เปิดเมนูตั้งค่าอะไรเลย ผมพิมพ์สั่งเป็นภาษาไทย ให้ Claude สร้างไฟล์ของคนตรวจให้" · สลับไปหน้าจอจริง เดินตาม w8-demo-fixit.md ก้อน C</a:t>
+              <a:t>📍 สคริปต์สาธิต: w8-demo-fixit.md → ก้อน C · จบแล้วกลับเข้าสไลด์หน้า 61 · พูดว่า "ผมจะไม่เปิดเมนูตั้งค่าอะไรเลย ผมพิมพ์สั่งเป็นภาษาไทย ให้ Claude สร้างไฟล์ของคนตรวจให้"</a:t>
             </a:r>
           </a:p>
         </p:txBody>
@@ -4423,7 +4423,7 @@
           <a:lstStyle/>
           <a:p>
             <a:r>
-              <a:t>พูดว่า "นี่คือ FixIt ที่เราจบกันไว้สัปดาห์ที่แล้ว มีล็อกอิน มีกุญแจประตูหน้าบ้าน อยู่บนอินเทอร์เน็ตจริง ทีนี้ผมจะเลิกเป็นเจ้าของระบบสักครู่" · สลับไปหน้าจอจริง เดินตาม w8-demo-fixit.md ก้อน A</a:t>
+              <a:t>📍 สคริปต์สาธิต: w8-demo-fixit.md → ก้อน A · จบแล้วกลับเข้าสไลด์หน้า 8 · พูดว่า "นี่คือ FixIt ที่เราจบกันไว้สัปดาห์ที่แล้ว มีล็อกอิน มีกุญแจประตูหน้าบ้าน อยู่บนอินเทอร์เน็ตจริง ทีนี้ผมจะเลิกเป็นเจ้าของระบบสักครู่"</a:t>
             </a:r>
           </a:p>
         </p:txBody>
@@ -5053,7 +5053,7 @@
           <a:lstStyle/>
           <a:p>
             <a:r>
-              <a:t>"ลำดับตัดคือ A → B → C → D · ส่วน B ต้องเสร็จในคาบ · ส่วน D ยกไปทำในการบ้านได้ แต่ต้องเสร็จก่อนส่ง เพราะ Reviewer เป็นของส่งมอบตามคู่มือ" · ใบงานอยู่ใน Google Classroom แล้ว ให้เปิดอ่าน "สิ่งที่ต้องมีก่อนเริ่ม" ตอนพักเที่ยง · คีย์ OpenRouter ส่งให้ทางแชทส่วนตัวรายคนตอน 13:00 พร้อมชื่อโมเดลหลักและสำรอง</a:t>
+              <a:t>"ลำดับตัดคือ A → B → C → D · ส่วน B ต้องเสร็จในคาบ · ส่วน D ยกไปทำในการบ้านได้ แต่ต้องเสร็จก่อนส่ง เพราะ Reviewer เป็นของส่งมอบตามคู่มือ" · ใบงานอยู่ใน Google Classroom แล้ว ให้เปิดอ่าน "สิ่งที่ต้องมีก่อนเริ่ม" ตอนพักเที่ยง · คีย์ OpenRouter ส่งให้ทางแชทส่วนตัวรายคนตอน 13:00 พร้อมชื่อโมเดลหลักและสำรอง · ประกาศกำหนดส่ง: ใบงาน (LeaveEasy) วาง URL repo + URL เว็บ ภายในจันทร์ 14 ก.ย. · การบ้าน (หัวข้อตัวเอง) ภายในศุกร์ 18 ก.ย. ย้ำว่าส่ง URL อย่างเดียว และก่อนส่งต้องให้ Claude แสดงรายการไฟล์บน GitHub ให้ดูก่อนว่าไม่มีไฟล์คีย์ปนไป</a:t>
             </a:r>
           </a:p>
         </p:txBody>

--- a/materials/week8/w8-slides.pptx
+++ b/materials/week8/w8-slides.pptx
@@ -2323,7 +2323,7 @@
           <a:lstStyle/>
           <a:p>
             <a:r>
-              <a:t>🎬 เดโมขั้นที่ 5 (3 นาที) — ทำสามขั้นนี้ให้ดูจริง · "จำลำดับนี้ให้ขึ้นใจ กัน Git มองเห็นก่อน แล้วค่อยวางคีย์ .gitignore คือรายชื่อไฟล์ที่ Git ห้ามเก็บ ตั้งกันไว้แล้วตั้งแต่สัปดาห์ที่แล้ว" · "git status คือหลักฐาน ถ้าชื่อไฟล์ไม่โผล่ แปลว่าคีย์จะไม่ติดไปกับ commit" · เตือน: เผลอ push คีย์ = แจ้งผู้สอนเพิกถอนทันที ลบ commit อย่างเดียวไม่พอ</a:t>
+              <a:t>🎬 เดโมขั้นที่ 5 (3 นาที) — ทำสามขั้นนี้ให้ดูจริง · "จำลำดับนี้ให้ขึ้นใจ กัน Git มองเห็นก่อน แล้วค่อยวางคีย์ .gitignore คือรายชื่อไฟล์ที่ Git ห้ามเก็บ ตั้งกันไว้แล้วตั้งแต่สัปดาห์ที่แล้ว" · "รายการไฟล์ที่มันแสดงมาคือหลักฐาน ถ้าชื่อไฟล์ไม่โผล่ แปลว่าคีย์จะไม่ติดไปกับ commit — พิมพ์บอกมันว่า แสดงรายการไฟล์ที่กำลังจะส่งขึ้น GitHub ให้ผมดู" · เตือน: เผลอ push คีย์ = แจ้งผู้สอนเพิกถอนทันที ลบ commit อย่างเดียวไม่พอ</a:t>
             </a:r>
           </a:p>
         </p:txBody>
@@ -14803,7 +14803,7 @@
                 <a:ea typeface="Consolas"/>
                 <a:cs typeface="Consolas"/>
               </a:rPr>
-              <a:t>2) git status   ← ต้องไม่เห็นชื่อไฟล์นี้ในรายการ</a:t>
+              <a:t>2) ให้ Claude แสดงรายการไฟล์ที่จะส่งขึ้น ← ต้องไม่เห็นชื่อไฟล์นี้</a:t>
             </a:r>
           </a:p>
           <a:p>

--- a/materials/week8/w8-slides.pptx
+++ b/materials/week8/w8-slides.pptx
@@ -1203,7 +1203,7 @@
           <a:lstStyle/>
           <a:p>
             <a:r>
-              <a:t>🎬 เดโมขั้นที่ 3 (3 นาที) — deploy กฎ แล้วกลับไปรีเฟรชหน้าจอของคนแปลกหน้า ให้ห้องเห็นข้อมูลหายไปกับตา · "คำสั่งนี้เจอกันแล้วสัปดาห์ที่แล้วตอนส่งกุญแจประตูหน้าบ้านขึ้นไป วันนี้ใช้ตัวเดิม" · เตือนอาการคลาสสิก: แก้กฎในเครื่องแล้วงงว่าทำไมออนไลน์ยังรั่ว</a:t>
+              <a:t>🎬 เดโมขั้นที่ 3 (3 นาที) — ให้ Claude ส่งกฎขึ้นไป แล้วกลับไปรีเฟรชหน้าจอของคนแปลกหน้า ให้ห้องเห็นข้อมูลหายไปกับตา · ย้ำว่าไม่ต้องจำคำสั่ง "เหมือนตอนส่งกุญแจประตูหน้าบ้านขึ้นไปสัปดาห์ที่แล้วครับ พิมพ์ภาษาไทยบอกมันเหมือนเดิม" · เตือนอาการคลาสสิก: แก้กฎในเครื่องแล้วงงว่าทำไมออนไลน์ยังรั่ว</a:t>
             </a:r>
           </a:p>
         </p:txBody>
@@ -10947,24 +10947,27 @@
       </p:sp>
       <p:sp>
         <p:nvSpPr>
-          <p:cNvPr id="3" name="Rectangle 2"/>
+          <p:cNvPr id="3" name="Rounded Rectangle 2"/>
           <p:cNvSpPr/>
           <p:nvPr/>
         </p:nvSpPr>
         <p:spPr>
           <a:xfrm>
             <a:off x="822960" y="1472184"/>
-            <a:ext cx="10545775" cy="676656"/>
-          </a:xfrm>
-          <a:prstGeom prst="rect">
+            <a:ext cx="10545775" cy="1078992"/>
+          </a:xfrm>
+          <a:prstGeom prst="roundRect">
             <a:avLst/>
           </a:prstGeom>
           <a:solidFill>
-            <a:srgbClr val="F2F4F7"/>
+            <a:srgbClr val="FFF7E6"/>
           </a:solidFill>
-          <a:ln>
-            <a:noFill/>
+          <a:ln w="22225">
+            <a:solidFill>
+              <a:srgbClr val="E0A02C"/>
+            </a:solidFill>
           </a:ln>
+          <a:effectLst/>
         </p:spPr>
         <p:style>
           <a:lnRef idx="1">
@@ -10981,33 +10984,142 @@
           </a:fontRef>
         </p:style>
         <p:txBody>
-          <a:bodyPr rtlCol="0" anchor="ctr" wrap="none" lIns="228600" tIns="137160"/>
+          <a:bodyPr rtlCol="0" anchor="ctr"/>
+          <a:lstStyle/>
+          <a:p/>
+        </p:txBody>
+      </p:sp>
+      <p:sp>
+        <p:nvSpPr>
+          <p:cNvPr id="4" name="Rounded Rectangle 3"/>
+          <p:cNvSpPr/>
+          <p:nvPr/>
+        </p:nvSpPr>
+        <p:spPr>
+          <a:xfrm>
+            <a:off x="822960" y="1472184"/>
+            <a:ext cx="100584" cy="1078992"/>
+          </a:xfrm>
+          <a:prstGeom prst="roundRect">
+            <a:avLst/>
+          </a:prstGeom>
+          <a:solidFill>
+            <a:srgbClr val="E0A02C"/>
+          </a:solidFill>
+          <a:ln>
+            <a:noFill/>
+          </a:ln>
+          <a:effectLst/>
+        </p:spPr>
+        <p:style>
+          <a:lnRef idx="1">
+            <a:schemeClr val="accent1"/>
+          </a:lnRef>
+          <a:fillRef idx="3">
+            <a:schemeClr val="accent1"/>
+          </a:fillRef>
+          <a:effectRef idx="2">
+            <a:schemeClr val="accent1"/>
+          </a:effectRef>
+          <a:fontRef idx="minor">
+            <a:schemeClr val="lt1"/>
+          </a:fontRef>
+        </p:style>
+        <p:txBody>
+          <a:bodyPr rtlCol="0" anchor="ctr"/>
+          <a:lstStyle/>
+          <a:p>
+            <a:pPr algn="ctr"/>
+          </a:p>
+        </p:txBody>
+      </p:sp>
+      <p:sp>
+        <p:nvSpPr>
+          <p:cNvPr id="5" name="TextBox 4"/>
+          <p:cNvSpPr txBox="1"/>
+          <p:nvPr/>
+        </p:nvSpPr>
+        <p:spPr>
+          <a:xfrm>
+            <a:off x="1097280" y="1527048"/>
+            <a:ext cx="10088575" cy="310896"/>
+          </a:xfrm>
+          <a:prstGeom prst="rect">
+            <a:avLst/>
+          </a:prstGeom>
+          <a:noFill/>
+        </p:spPr>
+        <p:txBody>
+          <a:bodyPr wrap="square">
+            <a:spAutoFit/>
+          </a:bodyPr>
           <a:lstStyle/>
           <a:p>
             <a:pPr algn="l"/>
             <a:r>
-              <a:rPr sz="1800" b="0">
+              <a:rPr sz="1400" b="1">
+                <a:solidFill>
+                  <a:srgbClr val="A86C0A"/>
+                </a:solidFill>
+                <a:latin typeface="Leelawadee UI"/>
+                <a:ea typeface="Leelawadee UI"/>
+                <a:cs typeface="Leelawadee UI"/>
+              </a:rPr>
+              <a:t>💬 พิมพ์แบบนี้</a:t>
+            </a:r>
+          </a:p>
+        </p:txBody>
+      </p:sp>
+      <p:sp>
+        <p:nvSpPr>
+          <p:cNvPr id="6" name="TextBox 5"/>
+          <p:cNvSpPr txBox="1"/>
+          <p:nvPr/>
+        </p:nvSpPr>
+        <p:spPr>
+          <a:xfrm>
+            <a:off x="1097280" y="1856232"/>
+            <a:ext cx="10088575" cy="384048"/>
+          </a:xfrm>
+          <a:prstGeom prst="rect">
+            <a:avLst/>
+          </a:prstGeom>
+          <a:noFill/>
+        </p:spPr>
+        <p:txBody>
+          <a:bodyPr wrap="square">
+            <a:spAutoFit/>
+          </a:bodyPr>
+          <a:lstStyle/>
+          <a:p>
+            <a:pPr algn="l">
+              <a:spcAft>
+                <a:spcPts val="0"/>
+              </a:spcAft>
+            </a:pPr>
+            <a:r>
+              <a:rPr sz="2000" b="0">
                 <a:solidFill>
                   <a:srgbClr val="1A1A1A"/>
                 </a:solidFill>
-                <a:latin typeface="Consolas"/>
-                <a:ea typeface="Consolas"/>
-                <a:cs typeface="Consolas"/>
-              </a:rPr>
-              <a:t>firebase deploy --only firestore:rules</a:t>
-            </a:r>
-          </a:p>
-        </p:txBody>
-      </p:sp>
-      <p:sp>
-        <p:nvSpPr>
-          <p:cNvPr id="4" name="TextBox 3"/>
-          <p:cNvSpPr txBox="1"/>
-          <p:nvPr/>
-        </p:nvSpPr>
-        <p:spPr>
-          <a:xfrm>
-            <a:off x="822960" y="2331720"/>
+                <a:latin typeface="Leelawadee UI"/>
+                <a:ea typeface="Leelawadee UI"/>
+                <a:cs typeface="Leelawadee UI"/>
+              </a:rPr>
+              <a:t>ช่วยส่งไฟล์กฎขึ้นไปใช้งานจริงให้ผม</a:t>
+            </a:r>
+          </a:p>
+        </p:txBody>
+      </p:sp>
+      <p:sp>
+        <p:nvSpPr>
+          <p:cNvPr id="7" name="TextBox 6"/>
+          <p:cNvSpPr txBox="1"/>
+          <p:nvPr/>
+        </p:nvSpPr>
+        <p:spPr>
+          <a:xfrm>
+            <a:off x="822960" y="2752344"/>
             <a:ext cx="10545775" cy="560324"/>
           </a:xfrm>
           <a:prstGeom prst="rect">
@@ -11038,7 +11150,7 @@
       </p:sp>
       <p:sp>
         <p:nvSpPr>
-          <p:cNvPr id="5" name="TextBox 4"/>
+          <p:cNvPr id="8" name="TextBox 7"/>
           <p:cNvSpPr txBox="1"/>
           <p:nvPr/>
         </p:nvSpPr>

--- a/materials/week8/w8-slides.pptx
+++ b/materials/week8/w8-slides.pptx
@@ -5263,7 +5263,7 @@
           <a:lstStyle/>
           <a:p>
             <a:r>
-              <a:t>อ่านช้า ๆ — "ข้อสองไม่ใช่คำแนะนำ เป็นเกณฑ์ผ่าน Module คนที่ไม่มี commit เลยคือยังไม่ผ่าน" · ข้อสามมีไว้จับว่าเดินเร็วเกินไปหรือเปล่า · ย้ำไฟจราจร 🟢🟡🔴 กับการโพสต์ screenshot ทุก Checkpoint</a:t>
+              <a:t>อ่านช้า ๆ — "ข้อสองไม่ใช่คำแนะนำ เป็นเกณฑ์ผ่าน Module คนที่ไม่มี commit เลยคือยังไม่ผ่าน" · ข้อสามมีไว้จับว่าเดินเร็วเกินไปหรือเปล่า · วางลิงก์ตารางห้องย่อยในแชทก่อนพักเที่ยง · ย้ำไฟจราจร 🟢🟡🔴 กับการโพสต์ screenshot ทุก Checkpoint</a:t>
             </a:r>
           </a:p>
         </p:txBody>
@@ -25829,7 +25829,7 @@
                 <a:ea typeface="Leelawadee UI"/>
                 <a:cs typeface="Leelawadee UI"/>
               </a:rPr>
-              <a:t>• 🖥️ สลับคนนำจอทุก Checkpoint · ทุกคนพิมพ์เอง</a:t>
+              <a:t>• 🔗 เช็กว่าคุณอยู่ห้องย่อยไหน — ตารางห้องย่อยอยู่ในแชท</a:t>
             </a:r>
           </a:p>
         </p:txBody>
@@ -25866,7 +25866,7 @@
                 <a:ea typeface="Leelawadee UI"/>
                 <a:cs typeface="Leelawadee UI"/>
               </a:rPr>
-              <a:t>• 👤 ทุกคนต้องมี commit ในชื่อตัวเอง</a:t>
+              <a:t>• 🖥️ สลับคนนำจอทุก Checkpoint · ทุกคนพิมพ์เอง</a:t>
             </a:r>
           </a:p>
         </p:txBody>
@@ -25903,6 +25903,43 @@
                 <a:ea typeface="Leelawadee UI"/>
                 <a:cs typeface="Leelawadee UI"/>
               </a:rPr>
+              <a:t>• 👤 ทุกคนต้องมี commit ในชื่อตัวเอง</a:t>
+            </a:r>
+          </a:p>
+        </p:txBody>
+      </p:sp>
+      <p:sp>
+        <p:nvSpPr>
+          <p:cNvPr id="6" name="TextBox 5"/>
+          <p:cNvSpPr txBox="1"/>
+          <p:nvPr/>
+        </p:nvSpPr>
+        <p:spPr>
+          <a:xfrm>
+            <a:off x="822960" y="3317748"/>
+            <a:ext cx="10545775" cy="560324"/>
+          </a:xfrm>
+          <a:prstGeom prst="rect">
+            <a:avLst/>
+          </a:prstGeom>
+          <a:noFill/>
+        </p:spPr>
+        <p:txBody>
+          <a:bodyPr wrap="square">
+            <a:spAutoFit/>
+          </a:bodyPr>
+          <a:lstStyle/>
+          <a:p>
+            <a:pPr algn="l"/>
+            <a:r>
+              <a:rPr sz="2600" b="0">
+                <a:solidFill>
+                  <a:srgbClr val="1A1A1A"/>
+                </a:solidFill>
+                <a:latin typeface="Leelawadee UI"/>
+                <a:ea typeface="Leelawadee UI"/>
+                <a:cs typeface="Leelawadee UI"/>
+              </a:rPr>
               <a:t>• ❓ เรียก TA แล้วให้คนที่ไม่ได้พิมพ์เป็นคนอธิบาย</a:t>
             </a:r>
           </a:p>
@@ -25910,7 +25947,7 @@
       </p:sp>
       <p:sp>
         <p:nvSpPr>
-          <p:cNvPr id="6" name="TextBox 5"/>
+          <p:cNvPr id="7" name="TextBox 6"/>
           <p:cNvSpPr txBox="1"/>
           <p:nvPr/>
         </p:nvSpPr>

--- a/materials/week8/w8-slides.pptx
+++ b/materials/week8/w8-slides.pptx
@@ -5053,7 +5053,7 @@
           <a:lstStyle/>
           <a:p>
             <a:r>
-              <a:t>"ลำดับตัดคือ A → B → C → D · ส่วน B ต้องเสร็จในคาบ · ส่วน D ยกไปทำในการบ้านได้ แต่ต้องเสร็จก่อนส่ง เพราะ Reviewer เป็นของส่งมอบตามคู่มือ" · ใบงานอยู่ใน Google Classroom แล้ว ให้เปิดอ่าน "สิ่งที่ต้องมีก่อนเริ่ม" ตอนพักเที่ยง · คีย์ OpenRouter ส่งให้ทางแชทส่วนตัวรายคนตอน 13:00 พร้อมชื่อโมเดลหลักและสำรอง · ประกาศกำหนดส่ง: ใบงาน (LeaveEasy) วาง URL repo + URL เว็บ ภายในจันทร์ 14 ก.ย. · การบ้าน (หัวข้อตัวเอง) ภายในศุกร์ 18 ก.ย. ย้ำว่าส่ง URL อย่างเดียว และก่อนส่งต้องให้ Claude แสดงรายการไฟล์บน GitHub ให้ดูก่อนว่าไม่มีไฟล์คีย์ปนไป</a:t>
+              <a:t>บอกก่อนว่า "ใบงานวันนี้ออกแบบให้เสร็จใน 2 ชั่วโมง เวลาที่เหลือคือเวลาสำรอง ไม่มีงานต่อยอดให้ทำเพิ่ม" · "ลำดับตัดคือ A → B → C → D · ส่วน B ต้องเสร็จในคาบ · ส่วน D ยกไปทำในการบ้านได้ แต่ต้องเสร็จก่อนส่ง เพราะ Reviewer เป็นของส่งมอบตามคู่มือ" · ใบงานอยู่ใน Google Classroom แล้ว ให้เปิดอ่าน "สิ่งที่ต้องมีก่อนเริ่ม" ตอนพักเที่ยง · คีย์ OpenRouter ส่งให้ทางแชทส่วนตัวรายคนตอน 13:00 พร้อมชื่อโมเดลหลักและสำรอง · ประกาศกำหนดส่ง: ใบงาน (LeaveEasy) วาง URL repo ภายในจันทร์ 14 ก.ย. · การบ้าน (หัวข้อตัวเอง) ภายในศุกร์ 18 ก.ย. ย้ำว่าส่ง URL repo ลิงก์เดียวเท่านั้น URL เว็บออนไลน์ให้เขียนไว้บนสุดของ README.md ในrepo และก่อนส่งต้องให้ Claude แสดงรายการไฟล์บน GitHub ให้ดูก่อนว่าไม่มีไฟล์คีย์ปนไป</a:t>
             </a:r>
           </a:p>
         </p:txBody>
@@ -24989,7 +24989,7 @@
                 <a:ea typeface="Leelawadee UI"/>
                 <a:cs typeface="Leelawadee UI"/>
               </a:rPr>
-              <a:t>• ส่วน A ปิดข้อมูล 5 ข้อ + สวมรอย ⏱ 35 นาที</a:t>
+              <a:t>• ส่วน A ปิดข้อมูล 5 ข้อ + สวมรอย ⏱ 30 นาที</a:t>
             </a:r>
           </a:p>
         </p:txBody>
@@ -25026,7 +25026,7 @@
                 <a:ea typeface="Leelawadee UI"/>
                 <a:cs typeface="Leelawadee UI"/>
               </a:rPr>
-              <a:t>• ส่วน B ผู้ช่วย AI ระดับ 1 ⏱ 40 นาที</a:t>
+              <a:t>• ส่วน B ผู้ช่วย AI ระดับ 1 ⏱ 36 นาที</a:t>
             </a:r>
           </a:p>
         </p:txBody>
@@ -25063,7 +25063,7 @@
                 <a:ea typeface="Leelawadee UI"/>
                 <a:cs typeface="Leelawadee UI"/>
               </a:rPr>
-              <a:t>• ส่วน C ผู้ช่วย AI ระดับ 2 (agentic) ⏱ 35 นาที</a:t>
+              <a:t>• ส่วน C ผู้ช่วย AI ระดับ 2 (agentic) ⏱ 23 นาที</a:t>
             </a:r>
           </a:p>
         </p:txBody>
@@ -25100,7 +25100,7 @@
                 <a:ea typeface="Leelawadee UI"/>
                 <a:cs typeface="Leelawadee UI"/>
               </a:rPr>
-              <a:t>• ส่วน D Reviewer + แก้กองแดง ⏱ 25 นาที</a:t>
+              <a:t>• ส่วน D Reviewer + แก้กองแดง ⏱ 16 นาที</a:t>
             </a:r>
           </a:p>
         </p:txBody>

--- a/materials/week8/w8-slides.pptx
+++ b/materials/week8/w8-slides.pptx
@@ -1203,7 +1203,7 @@
           <a:lstStyle/>
           <a:p>
             <a:r>
-              <a:t>🎬 เดโมขั้นที่ 3 (3 นาที) — ให้ Claude ส่งกฎขึ้นไป แล้วกลับไปรีเฟรชหน้าจอของคนแปลกหน้า ให้ห้องเห็นข้อมูลหายไปกับตา · ย้ำว่าไม่ต้องจำคำสั่ง "เหมือนตอนส่งกุญแจประตูหน้าบ้านขึ้นไปสัปดาห์ที่แล้วครับ พิมพ์ภาษาไทยบอกมันเหมือนเดิม" · เตือนอาการคลาสสิก: แก้กฎในเครื่องแล้วงงว่าทำไมออนไลน์ยังรั่ว</a:t>
+              <a:t>🎬 เดโมขั้นที่ 3 (3 นาที) — ให้ Claude ส่งกฎขึ้นไป แล้วกลับไปรีเฟรชหน้าจอของคนแปลกหน้า ให้ห้องเห็นข้อมูลหายไปกับตา · ย้ำว่าไม่ต้องจำคำสั่ง "เหมือนตอนส่งกุญแจคลังข้อมูลขึ้นไปสัปดาห์ที่แล้วครับ พิมพ์ภาษาไทยบอกมันเหมือนเดิม" · เตือนอาการคลาสสิก: แก้กฎในเครื่องแล้วงงว่าทำไมออนไลน์ยังรั่ว</a:t>
             </a:r>
           </a:p>
         </p:txBody>
@@ -4423,7 +4423,7 @@
           <a:lstStyle/>
           <a:p>
             <a:r>
-              <a:t>📍 สคริปต์สาธิต: w8-demo-fixit.md → ก้อน A · จบแล้วกลับเข้าสไลด์หน้า 8 · พูดว่า "นี่คือ FixIt ที่เราจบกันไว้สัปดาห์ที่แล้ว มีล็อกอิน มีกุญแจประตูหน้าบ้าน อยู่บนอินเทอร์เน็ตจริง ทีนี้ผมจะเลิกเป็นเจ้าของระบบสักครู่"</a:t>
+              <a:t>📍 สคริปต์สาธิต: w8-demo-fixit.md → ก้อน A · จบแล้วกลับเข้าสไลด์หน้า 8 · พูดว่า "นี่คือ FixIt ที่เราจบกันไว้สัปดาห์ที่แล้ว มีล็อกอิน มีกุญแจคลังข้อมูล อยู่บนอินเทอร์เน็ตจริง ทีนี้ผมจะเลิกเป็นเจ้าของระบบสักครู่"</a:t>
             </a:r>
           </a:p>
         </p:txBody>
@@ -5193,7 +5193,7 @@
           <a:lstStyle/>
           <a:p>
             <a:r>
-              <a:t>พูดช้า ๆ — "กุญแจสัปดาห์ที่แล้วถามคำเดียวว่า ล็อกอินหรือยัง มันไม่เคยถามว่า คุณเป็นใคร และของชิ้นนี้เป็นของคุณไหม" · "ใครก็สมัครบัญชีได้ใน 30 วินาที สมัครแล้วก็คือล็อกอินแล้ว ประตูหน้าบ้านจึงเปิดให้คนแปลกหน้าทุกคน"</a:t>
+              <a:t>พูดช้า ๆ — "กุญแจสัปดาห์ที่แล้วถามคำเดียวว่า ล็อกอินหรือยัง มันไม่เคยถามว่า คุณเป็นใคร และของชิ้นนี้เป็นของคุณไหม" · "ใครก็สมัครบัญชีได้ใน 30 วินาที สมัครแล้วก็คือล็อกอินแล้ว คลังข้อมูลจึงเปิดให้คนแปลกหน้าทุกคน"</a:t>
             </a:r>
           </a:p>
         </p:txBody>
@@ -5403,7 +5403,7 @@
           <a:lstStyle/>
           <a:p>
             <a:r>
-              <a:t>เชื่อมกลับสัปดาห์ที่ 7 — "ตอนนั้นผมบอกไว้แล้วว่ากุญแจประตูหน้าบ้านยังไม่ใช่ความปลอดภัยจริง และห้ามใส่ข้อมูลจริงของใครจนกว่าจะปิดรายห้อง วันนี้คือวันปิดรายห้อง" · ถามห้อง: "ระบบของคุณตอนนี้ ใครสมัครก็อ่านได้แบบนี้เหมือนกันไหมครับ" — คำตอบคือใช่ทุกคน</a:t>
+              <a:t>เชื่อมกลับสัปดาห์ที่ 7 — "ตอนนั้นผมบอกไว้แล้วว่ากุญแจคลังข้อมูลยังไม่ใช่ความปลอดภัยจริง และห้ามใส่ข้อมูลจริงของใครจนกว่าจะปิดรายห้อง วันนี้คือวันปิดรายห้อง" · ถามห้อง: "ระบบของคุณตอนนี้ ใครสมัครก็อ่านได้แบบนี้เหมือนกันไหมครับ" — คำตอบคือใช่ทุกคน</a:t>
             </a:r>
           </a:p>
         </p:txBody>
@@ -11308,7 +11308,7 @@
                 <a:ea typeface="Leelawadee UI"/>
                 <a:cs typeface="Leelawadee UI"/>
               </a:rPr>
-              <a:t>• 🔑 มีล็อกอิน และกุญแจประตูหน้าบ้าน 1 ข้อ</a:t>
+              <a:t>• 🔑 มีล็อกอิน และกุญแจคลังข้อมูล 1 ข้อ</a:t>
             </a:r>
           </a:p>
         </p:txBody>

--- a/materials/week8/w8-slides.pptx
+++ b/materials/week8/w8-slides.pptx
@@ -5053,7 +5053,7 @@
           <a:lstStyle/>
           <a:p>
             <a:r>
-              <a:t>บอกก่อนว่า "ใบงานวันนี้ออกแบบให้เสร็จใน 2 ชั่วโมง เวลาที่เหลือคือเวลาสำรอง ไม่มีงานต่อยอดให้ทำเพิ่ม" · "ลำดับตัดคือ A → B → C → D · ส่วน B ต้องเสร็จในคาบ · ส่วน D ยกไปทำในการบ้านได้ แต่ต้องเสร็จก่อนส่ง เพราะ Reviewer เป็นของส่งมอบตามคู่มือ" · ใบงานอยู่ใน Google Classroom แล้ว ให้เปิดอ่าน "สิ่งที่ต้องมีก่อนเริ่ม" ตอนพักเที่ยง · คีย์ OpenRouter ส่งให้ทางแชทส่วนตัวรายคนตอน 13:00 พร้อมชื่อโมเดลหลักและสำรอง · ประกาศกำหนดส่ง: ใบงาน (LeaveEasy) วาง URL repo ภายในจันทร์ 14 ก.ย. · การบ้าน (หัวข้อตัวเอง) ภายในศุกร์ 18 ก.ย. ย้ำว่าส่ง URL repo ลิงก์เดียวเท่านั้น URL เว็บออนไลน์ให้เขียนไว้บนสุดของ README.md ในrepo และก่อนส่งต้องให้ Claude แสดงรายการไฟล์บน GitHub ให้ดูก่อนว่าไม่มีไฟล์คีย์ปนไป</a:t>
+              <a:t>บอกก่อนว่า "ใบงานวันนี้ออกแบบให้เสร็จใน 2 ชั่วโมง เวลาที่เหลือคือเวลาสำรอง ไม่มีงานต่อยอดให้ทำเพิ่ม" · ชี้ส่วน A แล้วบอกว่า "ส่วนนี้สั้นเพราะคุณเขียนตารางสิทธิ์ไว้แล้วสัปดาห์ที่แล้ว วันนี้แค่เอาไปบังคับใช้จริงที่คลัง เวลาที่เหลือเป็นของผู้ช่วย AI" · "ลำดับตัดคือ A → B → C → D · ส่วน B ต้องเสร็จในคาบ · ส่วน D ยกไปทำในการบ้านได้ แต่ต้องเสร็จก่อนส่ง เพราะ Reviewer เป็นของส่งมอบตามคู่มือ" · ใบงานอยู่ใน Google Classroom แล้ว ให้เปิดอ่าน "สิ่งที่ต้องมีก่อนเริ่ม" ตอนพักเที่ยง · คีย์ OpenRouter ส่งให้ทางแชทส่วนตัวรายคนตอน 13:00 พร้อมชื่อโมเดลหลักและสำรอง · ประกาศกำหนดส่ง: ใบงาน (LeaveEasy) วาง URL repo ภายในจันทร์ 14 ก.ย. · การบ้าน (หัวข้อตัวเอง) ภายในศุกร์ 18 ก.ย. ย้ำว่าส่ง URL repo ลิงก์เดียวเท่านั้น URL เว็บออนไลน์ให้เขียนไว้บนสุดของ README.md ในrepo และก่อนส่งต้องให้ Claude แสดงรายการไฟล์บน GitHub ให้ดูก่อนว่าไม่มีไฟล์คีย์ปนไป</a:t>
             </a:r>
           </a:p>
         </p:txBody>
@@ -24989,7 +24989,7 @@
                 <a:ea typeface="Leelawadee UI"/>
                 <a:cs typeface="Leelawadee UI"/>
               </a:rPr>
-              <a:t>• ส่วน A ปิดข้อมูล 5 ข้อ + สวมรอย ⏱ 30 นาที</a:t>
+              <a:t>• ส่วน A แปลง ACL.md เป็นกฎ + สวมรอย ⏱ 18 นาที</a:t>
             </a:r>
           </a:p>
         </p:txBody>
@@ -25063,7 +25063,7 @@
                 <a:ea typeface="Leelawadee UI"/>
                 <a:cs typeface="Leelawadee UI"/>
               </a:rPr>
-              <a:t>• ส่วน C ผู้ช่วย AI ระดับ 2 (agentic) ⏱ 23 นาที</a:t>
+              <a:t>• ส่วน C ผู้ช่วย AI ระดับ 2 (agentic) ⏱ 35 นาที</a:t>
             </a:r>
           </a:p>
         </p:txBody>

--- a/materials/week8/w8-slides.pptx
+++ b/materials/week8/w8-slides.pptx
@@ -5053,7 +5053,7 @@
           <a:lstStyle/>
           <a:p>
             <a:r>
-              <a:t>บอกก่อนว่า "ใบงานวันนี้ออกแบบให้เสร็จใน 2 ชั่วโมง เวลาที่เหลือคือเวลาสำรอง ไม่มีงานต่อยอดให้ทำเพิ่ม" · ชี้ส่วน A แล้วบอกว่า "ส่วนนี้สั้นเพราะคุณเขียนตารางสิทธิ์ไว้แล้วสัปดาห์ที่แล้ว วันนี้แค่เอาไปบังคับใช้จริงที่คลัง เวลาที่เหลือเป็นของผู้ช่วย AI" · "ลำดับตัดคือ A → B → C → D · ส่วน B ต้องเสร็จในคาบ · ส่วน D ยกไปทำในการบ้านได้ แต่ต้องเสร็จก่อนส่ง เพราะ Reviewer เป็นของส่งมอบตามคู่มือ" · ใบงานอยู่ใน Google Classroom แล้ว ให้เปิดอ่าน "สิ่งที่ต้องมีก่อนเริ่ม" ตอนพักเที่ยง · คีย์ OpenRouter ส่งให้ทางแชทส่วนตัวรายคนตอน 13:00 พร้อมชื่อโมเดลหลักและสำรอง · ประกาศกำหนดส่ง: ใบงาน (LeaveEasy) วาง URL repo ภายในจันทร์ 14 ก.ย. · การบ้าน (หัวข้อตัวเอง) ภายในศุกร์ 18 ก.ย. ย้ำว่าส่ง URL repo ลิงก์เดียวเท่านั้น URL เว็บออนไลน์ให้เขียนไว้บนสุดของ README.md ในrepo และก่อนส่งต้องให้ Claude แสดงรายการไฟล์บน GitHub ให้ดูก่อนว่าไม่มีไฟล์คีย์ปนไป</a:t>
+              <a:t>บอกก่อนว่า "ใบงานวันนี้ออกแบบให้เสร็จใน 2 ชั่วโมง เวลาที่เหลือคือเวลาสำรอง ไม่มีงานต่อยอดให้ทำเพิ่ม" · บอกว่า "บ่ายนี้ทั้งคาบเป็นเรื่องผู้ช่วย AI ล้วน ๆ ส่วนกฎปิดข้อมูลเราทำไปแล้วสัปดาห์ที่แล้ว" · "ลำดับตัดคือ A → B → C · ส่วน A ต้องเสร็จในคาบ · ส่วน D ยกไปทำในการบ้านได้ แต่ต้องเสร็จก่อนส่ง เพราะ Reviewer เป็นของส่งมอบตามคู่มือ" · ใบงานอยู่ใน Google Classroom แล้ว ให้เปิดอ่าน "สิ่งที่ต้องมีก่อนเริ่ม" ตอนพักเที่ยง · คีย์ OpenRouter ส่งให้ทางแชทส่วนตัวรายคนตอน 13:00 พร้อมชื่อโมเดลหลักและสำรอง · ประกาศกำหนดส่ง: ใบงาน (LeaveEasy) วาง URL repo ภายในจันทร์ 14 ก.ย. · การบ้าน (หัวข้อตัวเอง) ภายในศุกร์ 18 ก.ย. ย้ำว่าส่ง URL repo ลิงก์เดียวเท่านั้น URL เว็บออนไลน์ให้เขียนไว้บนสุดของ README.md ในrepo และก่อนส่งต้องให้ Claude แสดงรายการไฟล์บน GitHub ให้ดูก่อนว่าไม่มีไฟล์คีย์ปนไป</a:t>
             </a:r>
           </a:p>
         </p:txBody>
@@ -5123,7 +5123,7 @@
           <a:lstStyle/>
           <a:p>
             <a:r>
-              <a:t>"ถ้าทำไม่ทัน ให้ถึงจุดที่ 2 เป็นอย่างน้อย — ห้ามจบสัปดาห์นี้โดยที่กฎยังเปิดกว้าง เพราะระบบอยู่บนอินเทอร์เน็ตแล้ว" · จุดที่ 1 ต้องทดสอบด้วยการสวมรอยจริง ไม่ใช่ดูหน้าจอตัวเอง</a:t>
+              <a:t>"ถ้าทำไม่ทัน ให้ถึงจุดที่ 1 เป็นอย่างน้อย" · ย้ำว่าปุ่ม AI ต้องมีป้ายกำกับและต้องไม่ค้างเมื่อเรียกไม่สำเร็จ</a:t>
             </a:r>
           </a:p>
         </p:txBody>
@@ -24989,7 +24989,7 @@
                 <a:ea typeface="Leelawadee UI"/>
                 <a:cs typeface="Leelawadee UI"/>
               </a:rPr>
-              <a:t>• ส่วน A แปลง ACL.md เป็นกฎ + สวมรอย ⏱ 18 นาที</a:t>
+              <a:t>• ส่วน A ผู้ช่วย AI ระดับ 1 ⏱ 36 นาที</a:t>
             </a:r>
           </a:p>
         </p:txBody>
@@ -25026,7 +25026,7 @@
                 <a:ea typeface="Leelawadee UI"/>
                 <a:cs typeface="Leelawadee UI"/>
               </a:rPr>
-              <a:t>• ส่วน B ผู้ช่วย AI ระดับ 1 ⏱ 36 นาที</a:t>
+              <a:t>• ส่วน B ผู้ช่วย AI ระดับ 2 (agentic) ⏱ 35 นาที</a:t>
             </a:r>
           </a:p>
         </p:txBody>
@@ -25063,7 +25063,7 @@
                 <a:ea typeface="Leelawadee UI"/>
                 <a:cs typeface="Leelawadee UI"/>
               </a:rPr>
-              <a:t>• ส่วน C ผู้ช่วย AI ระดับ 2 (agentic) ⏱ 35 นาที</a:t>
+              <a:t>• ส่วน C Reviewer + แก้กองแดง ⏱ 16 นาที</a:t>
             </a:r>
           </a:p>
         </p:txBody>
@@ -25071,43 +25071,6 @@
       <p:sp>
         <p:nvSpPr>
           <p:cNvPr id="6" name="TextBox 5"/>
-          <p:cNvSpPr txBox="1"/>
-          <p:nvPr/>
-        </p:nvSpPr>
-        <p:spPr>
-          <a:xfrm>
-            <a:off x="822960" y="3317748"/>
-            <a:ext cx="10545775" cy="560324"/>
-          </a:xfrm>
-          <a:prstGeom prst="rect">
-            <a:avLst/>
-          </a:prstGeom>
-          <a:noFill/>
-        </p:spPr>
-        <p:txBody>
-          <a:bodyPr wrap="square">
-            <a:spAutoFit/>
-          </a:bodyPr>
-          <a:lstStyle/>
-          <a:p>
-            <a:pPr algn="l"/>
-            <a:r>
-              <a:rPr sz="2600" b="0">
-                <a:solidFill>
-                  <a:srgbClr val="1A1A1A"/>
-                </a:solidFill>
-                <a:latin typeface="Leelawadee UI"/>
-                <a:ea typeface="Leelawadee UI"/>
-                <a:cs typeface="Leelawadee UI"/>
-              </a:rPr>
-              <a:t>• ส่วน D Reviewer + แก้กองแดง ⏱ 16 นาที</a:t>
-            </a:r>
-          </a:p>
-        </p:txBody>
-      </p:sp>
-      <p:sp>
-        <p:nvSpPr>
-          <p:cNvPr id="7" name="TextBox 6"/>
           <p:cNvSpPr txBox="1"/>
           <p:nvPr/>
         </p:nvSpPr>
@@ -25553,7 +25516,7 @@
                 <a:ea typeface="Leelawadee UI"/>
                 <a:cs typeface="Leelawadee UI"/>
               </a:rPr>
-              <a:t>🚩 Checkpoint 4 จุดของบ่ายนี้</a:t>
+              <a:t>🚩 Checkpoint 3 จุดของบ่ายนี้</a:t>
             </a:r>
           </a:p>
         </p:txBody>
@@ -25567,6 +25530,43 @@
         <p:spPr>
           <a:xfrm>
             <a:off x="822960" y="1472184"/>
+            <a:ext cx="10545775" cy="1029208"/>
+          </a:xfrm>
+          <a:prstGeom prst="rect">
+            <a:avLst/>
+          </a:prstGeom>
+          <a:noFill/>
+        </p:spPr>
+        <p:txBody>
+          <a:bodyPr wrap="square">
+            <a:spAutoFit/>
+          </a:bodyPr>
+          <a:lstStyle/>
+          <a:p>
+            <a:pPr algn="l"/>
+            <a:r>
+              <a:rPr sz="2600" b="0">
+                <a:solidFill>
+                  <a:srgbClr val="1A1A1A"/>
+                </a:solidFill>
+                <a:latin typeface="Leelawadee UI"/>
+                <a:ea typeface="Leelawadee UI"/>
+                <a:cs typeface="Leelawadee UI"/>
+              </a:rPr>
+              <a:t>• 1 ผู้ช่วยระดับ 1 ทำงานได้ + มีป้าย + ปิดเน็ตแล้วไม่ค้าง</a:t>
+            </a:r>
+          </a:p>
+        </p:txBody>
+      </p:sp>
+      <p:sp>
+        <p:nvSpPr>
+          <p:cNvPr id="4" name="TextBox 3"/>
+          <p:cNvSpPr txBox="1"/>
+          <p:nvPr/>
+        </p:nvSpPr>
+        <p:spPr>
+          <a:xfrm>
+            <a:off x="822960" y="2556256"/>
             <a:ext cx="10545775" cy="560324"/>
           </a:xfrm>
           <a:prstGeom prst="rect">
@@ -25590,44 +25590,7 @@
                 <a:ea typeface="Leelawadee UI"/>
                 <a:cs typeface="Leelawadee UI"/>
               </a:rPr>
-              <a:t>• 1 สมัครบัญชีที่สองแล้วเปิดข้อมูลบัญชีแรกไม่ได้</a:t>
-            </a:r>
-          </a:p>
-        </p:txBody>
-      </p:sp>
-      <p:sp>
-        <p:nvSpPr>
-          <p:cNvPr id="4" name="TextBox 3"/>
-          <p:cNvSpPr txBox="1"/>
-          <p:nvPr/>
-        </p:nvSpPr>
-        <p:spPr>
-          <a:xfrm>
-            <a:off x="822960" y="2087372"/>
-            <a:ext cx="10545775" cy="1029208"/>
-          </a:xfrm>
-          <a:prstGeom prst="rect">
-            <a:avLst/>
-          </a:prstGeom>
-          <a:noFill/>
-        </p:spPr>
-        <p:txBody>
-          <a:bodyPr wrap="square">
-            <a:spAutoFit/>
-          </a:bodyPr>
-          <a:lstStyle/>
-          <a:p>
-            <a:pPr algn="l"/>
-            <a:r>
-              <a:rPr sz="2600" b="0">
-                <a:solidFill>
-                  <a:srgbClr val="1A1A1A"/>
-                </a:solidFill>
-                <a:latin typeface="Leelawadee UI"/>
-                <a:ea typeface="Leelawadee UI"/>
-                <a:cs typeface="Leelawadee UI"/>
-              </a:rPr>
-              <a:t>• 2 ผู้ช่วยระดับ 1 ทำงานได้ + มีป้าย + ปิดเน็ตแล้วไม่ค้าง</a:t>
+              <a:t>• 2 ระดับ 2 ทำงานเป็นขั้นได้ + มีบันทึก aiLog</a:t>
             </a:r>
           </a:p>
         </p:txBody>
@@ -25664,7 +25627,7 @@
                 <a:ea typeface="Leelawadee UI"/>
                 <a:cs typeface="Leelawadee UI"/>
               </a:rPr>
-              <a:t>• 3 ระดับ 2 ทำงานเป็นขั้นได้ + มีบันทึก aiLog</a:t>
+              <a:t>• 3 Reviewer รายงานแล้ว + แก้กองแดง 1 ข้อ</a:t>
             </a:r>
           </a:p>
         </p:txBody>
@@ -25672,43 +25635,6 @@
       <p:sp>
         <p:nvSpPr>
           <p:cNvPr id="6" name="TextBox 5"/>
-          <p:cNvSpPr txBox="1"/>
-          <p:nvPr/>
-        </p:nvSpPr>
-        <p:spPr>
-          <a:xfrm>
-            <a:off x="822960" y="3786632"/>
-            <a:ext cx="10545775" cy="560324"/>
-          </a:xfrm>
-          <a:prstGeom prst="rect">
-            <a:avLst/>
-          </a:prstGeom>
-          <a:noFill/>
-        </p:spPr>
-        <p:txBody>
-          <a:bodyPr wrap="square">
-            <a:spAutoFit/>
-          </a:bodyPr>
-          <a:lstStyle/>
-          <a:p>
-            <a:pPr algn="l"/>
-            <a:r>
-              <a:rPr sz="2600" b="0">
-                <a:solidFill>
-                  <a:srgbClr val="1A1A1A"/>
-                </a:solidFill>
-                <a:latin typeface="Leelawadee UI"/>
-                <a:ea typeface="Leelawadee UI"/>
-                <a:cs typeface="Leelawadee UI"/>
-              </a:rPr>
-              <a:t>• 4 Reviewer รายงานแล้ว + แก้กองแดง 1 ข้อ</a:t>
-            </a:r>
-          </a:p>
-        </p:txBody>
-      </p:sp>
-      <p:sp>
-        <p:nvSpPr>
-          <p:cNvPr id="7" name="TextBox 6"/>
           <p:cNvSpPr txBox="1"/>
           <p:nvPr/>
         </p:nvSpPr>
